--- a/05. DOCUMENTACION/PRESENTACION TI.1.4. RESTFUL sin BDD en DOTNET GR4.pptx
+++ b/05. DOCUMENTACION/PRESENTACION TI.1.4. RESTFUL sin BDD en DOTNET GR4.pptx
@@ -8402,7 +8402,7 @@
           <a:p>
             <a:r>
               <a:rPr lang="es-EC"/>
-              <a:t>Servidor [SOAP | RESTful]</a:t>
+              <a:t>Servidor RESTful</a:t>
             </a:r>
           </a:p>
         </p:txBody>
@@ -8458,7 +8458,7 @@
           <a:p>
             <a:r>
               <a:rPr lang="es-MX"/>
-              <a:t>[Tecnología] · [URL base del servicio]</a:t>
+              <a:t>ASP.NET Core Web API · http://localhost:5013</a:t>
             </a:r>
             <a:endParaRPr lang="es-EC"/>
           </a:p>
@@ -8549,7 +8549,7 @@
             </a:pPr>
             <a:r>
               <a:rPr lang="es-MX"/>
-              <a:t>Crear un proyecto [tipo de proyecto] en [IDE].</a:t>
+              <a:t>Crear un proyecto ASP.NET Core Web API en Visual Studio 2026.</a:t>
             </a:r>
           </a:p>
           <a:p>
@@ -8559,7 +8559,7 @@
             </a:pPr>
             <a:r>
               <a:rPr lang="es-MX"/>
-              <a:t>Nombrarlo WS_CON_UNI_[JAVA | DOTNET]_[SOAP | RESTful] con el paquete ec.edu.monster.</a:t>
+              <a:t>Nombrarlo WS_CON_UNI_DOTNET_RESTful (también es su espacio de nombres).</a:t>
             </a:r>
           </a:p>
           <a:p>
@@ -8569,7 +8569,7 @@
             </a:pPr>
             <a:r>
               <a:rPr lang="es-MX"/>
-              <a:t>Configurar [servidor de aplicaciones y puerto].</a:t>
+              <a:t>Configurar Kestrel en http://0.0.0.0:5013 (launchSettings.json).</a:t>
             </a:r>
           </a:p>
           <a:p>
@@ -8579,7 +8579,7 @@
             </a:pPr>
             <a:r>
               <a:rPr lang="es-MX"/>
-              <a:t>Agregar las dependencias: [librerías].</a:t>
+              <a:t>Agregar las dependencias: Microsoft.AspNetCore.OpenApi 10.0.12.</a:t>
             </a:r>
             <a:endParaRPr lang="es-EC"/>
           </a:p>
@@ -8762,7 +8762,7 @@
           <a:p>
             <a:r>
               <a:rPr lang="es-MX"/>
-              <a:t>[Servicios web SOAP | Endpoints REST]: exponen las operaciones al exterior.</a:t>
+              <a:t>Endpoints REST (LoginEndpoint, CatalogEndpoint y ConverterEndpoint): exponen las operaciones al exterior.</a:t>
             </a:r>
             <a:endParaRPr lang="es-EC"/>
           </a:p>
@@ -9607,7 +9607,7 @@
                 </a:solidFill>
                 <a:latin typeface="Segoe UI" panose="020B0502040204020203" pitchFamily="34" charset="0"/>
               </a:rPr>
-              <a:t>Rutas en este proyecto:  [login → …]  ·  [catálogo → …]  ·  [conversión → …]</a:t>
+              <a:t>Rutas en este proyecto:  login → POST /login  ·  catálogo → GET /catalog/{tipo}  ·  conversión → POST /converter</a:t>
             </a:r>
             <a:endParaRPr lang="es-EC" sz="1500">
               <a:solidFill>
@@ -10837,58 +10837,324 @@
           <a:p>
             <a:pPr>
               <a:lnSpc>
-                <a:spcPct val="110000"/>
+                <a:spcPct val="100000"/>
               </a:lnSpc>
+              <a:spcBef>
+                <a:spcPts val="0"/>
+              </a:spcBef>
+              <a:spcAft>
+                <a:spcPts val="0"/>
+              </a:spcAft>
             </a:pPr>
             <a:r>
-              <a:rPr lang="es-MX"/>
-              <a:t>[Pega aquí el fragmento principal:</a:t>
+              <a:rPr lang="en-US" noProof="1"/>
+              <a:t xml:space="preserve">[ApiController]</a:t>
             </a:r>
           </a:p>
           <a:p>
             <a:pPr>
               <a:lnSpc>
-                <a:spcPct val="110000"/>
+                <a:spcPct val="100000"/>
               </a:lnSpc>
+              <a:spcBef>
+                <a:spcPts val="0"/>
+              </a:spcBef>
+              <a:spcAft>
+                <a:spcPts val="0"/>
+              </a:spcAft>
             </a:pPr>
             <a:r>
+              <a:rPr lang="en-US" noProof="1"/>
+              <a:t xml:space="preserve">[Route("converter")]</a:t>
+            </a:r>
+          </a:p>
+          <a:p>
+            <a:pPr>
+              <a:lnSpc>
+                <a:spcPct val="100000"/>
+              </a:lnSpc>
+              <a:spcBef>
+                <a:spcPts val="0"/>
+              </a:spcBef>
+              <a:spcAft>
+                <a:spcPts val="0"/>
+              </a:spcAft>
+            </a:pPr>
+            <a:r>
+              <a:rPr lang="en-US" noProof="1"/>
+              <a:t xml:space="preserve">public class ConverterEndpoint : ControllerBase</a:t>
+            </a:r>
+          </a:p>
+          <a:p>
+            <a:pPr>
+              <a:lnSpc>
+                <a:spcPct val="100000"/>
+              </a:lnSpc>
+              <a:spcBef>
+                <a:spcPts val="0"/>
+              </a:spcBef>
+              <a:spcAft>
+                <a:spcPts val="0"/>
+              </a:spcAft>
+            </a:pPr>
+            <a:r>
+              <a:rPr lang="en-US" noProof="1"/>
+              <a:t xml:space="preserve">{</a:t>
+            </a:r>
+          </a:p>
+          <a:p>
+            <a:pPr>
+              <a:lnSpc>
+                <a:spcPct val="100000"/>
+              </a:lnSpc>
+              <a:spcBef>
+                <a:spcPts val="0"/>
+              </a:spcBef>
+              <a:spcAft>
+                <a:spcPts val="0"/>
+              </a:spcAft>
+            </a:pPr>
+            <a:r>
+              <a:rPr lang="en-US" noProof="1"/>
+              <a:t xml:space="preserve">  [HttpPost]</a:t>
+            </a:r>
+          </a:p>
+          <a:p>
+            <a:pPr>
+              <a:lnSpc>
+                <a:spcPct val="100000"/>
+              </a:lnSpc>
+              <a:spcBef>
+                <a:spcPts val="0"/>
+              </a:spcBef>
+              <a:spcAft>
+                <a:spcPts val="0"/>
+              </a:spcAft>
+            </a:pPr>
+            <a:r>
+              <a:rPr lang="en-US" noProof="1"/>
+              <a:t xml:space="preserve">  public ActionResult&lt;ConverterResponseDTO&gt; Convert(</a:t>
+            </a:r>
+          </a:p>
+          <a:p>
+            <a:pPr>
+              <a:lnSpc>
+                <a:spcPct val="100000"/>
+              </a:lnSpc>
+              <a:spcBef>
+                <a:spcPts val="0"/>
+              </a:spcBef>
+              <a:spcAft>
+                <a:spcPts val="0"/>
+              </a:spcAft>
+            </a:pPr>
+            <a:r>
+              <a:rPr lang="en-US" noProof="1"/>
+              <a:t xml:space="preserve">    [FromHeader(Name = "Authorization")] string token,</a:t>
+            </a:r>
+          </a:p>
+          <a:p>
+            <a:pPr>
+              <a:lnSpc>
+                <a:spcPct val="100000"/>
+              </a:lnSpc>
+              <a:spcBef>
+                <a:spcPts val="0"/>
+              </a:spcBef>
+              <a:spcAft>
+                <a:spcPts val="0"/>
+              </a:spcAft>
+            </a:pPr>
+            <a:r>
+              <a:rPr lang="en-US" noProof="1"/>
+              <a:t xml:space="preserve">    [FromBody] ConvertRequestDTO req)</a:t>
+            </a:r>
+          </a:p>
+          <a:p>
+            <a:pPr>
+              <a:lnSpc>
+                <a:spcPct val="100000"/>
+              </a:lnSpc>
+              <a:spcBef>
+                <a:spcPts val="0"/>
+              </a:spcBef>
+              <a:spcAft>
+                <a:spcPts val="0"/>
+              </a:spcAft>
+            </a:pPr>
+            <a:r>
+              <a:rPr lang="en-US" noProof="1"/>
+              <a:t xml:space="preserve">  {</a:t>
+            </a:r>
+          </a:p>
+          <a:p>
+            <a:pPr>
+              <a:lnSpc>
+                <a:spcPct val="100000"/>
+              </a:lnSpc>
+              <a:spcBef>
+                <a:spcPts val="0"/>
+              </a:spcBef>
+              <a:spcAft>
+                <a:spcPts val="0"/>
+              </a:spcAft>
+            </a:pPr>
+            <a:r>
+              <a:rPr lang="en-US" noProof="1"/>
+              <a:t xml:space="preserve">    if (!LoginController.ValidateUser(token))</a:t>
+            </a:r>
+          </a:p>
+          <a:p>
+            <a:pPr>
+              <a:lnSpc>
+                <a:spcPct val="100000"/>
+              </a:lnSpc>
+              <a:spcBef>
+                <a:spcPts val="0"/>
+              </a:spcBef>
+              <a:spcAft>
+                <a:spcPts val="0"/>
+              </a:spcAft>
+            </a:pPr>
+            <a:r>
+              <a:rPr lang="en-US" noProof="1"/>
+              <a:t xml:space="preserve">      return Unauthorized(new ConverterResponseDTO(</a:t>
+            </a:r>
+          </a:p>
+          <a:p>
+            <a:pPr>
+              <a:lnSpc>
+                <a:spcPct val="100000"/>
+              </a:lnSpc>
+              <a:spcBef>
+                <a:spcPts val="0"/>
+              </a:spcBef>
+              <a:spcAft>
+                <a:spcPts val="0"/>
+              </a:spcAft>
+            </a:pPr>
+            <a:r>
+              <a:rPr lang="en-US" noProof="1"/>
+              <a:t xml:space="preserve">        EstadosEnum.ERROR, "Token Inválido", 0));</a:t>
+            </a:r>
+          </a:p>
+          <a:p>
+            <a:pPr>
+              <a:lnSpc>
+                <a:spcPct val="100000"/>
+              </a:lnSpc>
+              <a:spcBef>
+                <a:spcPts val="0"/>
+              </a:spcBef>
+              <a:spcAft>
+                <a:spcPts val="0"/>
+              </a:spcAft>
+            </a:pPr>
+            <a:r>
+              <a:rPr lang="en-US" noProof="1"/>
+              <a:t xml:space="preserve">    return Ok(new ConverterResponseDTO(EstadosEnum.OK,</a:t>
+            </a:r>
+          </a:p>
+          <a:p>
+            <a:pPr>
+              <a:lnSpc>
+                <a:spcPct val="100000"/>
+              </a:lnSpc>
+              <a:spcBef>
+                <a:spcPts val="0"/>
+              </a:spcBef>
+              <a:spcAft>
+                <a:spcPts val="0"/>
+              </a:spcAft>
+            </a:pPr>
+            <a:r>
+              <a:rPr lang="en-US" noProof="1"/>
+              <a:t xml:space="preserve">      "Conversión Exitosa", ConverterController.Convert(</a:t>
+            </a:r>
+          </a:p>
+          <a:p>
+            <a:pPr>
+              <a:lnSpc>
+                <a:spcPct val="100000"/>
+              </a:lnSpc>
+              <a:spcBef>
+                <a:spcPts val="0"/>
+              </a:spcBef>
+              <a:spcAft>
+                <a:spcPts val="0"/>
+              </a:spcAft>
+            </a:pPr>
+            <a:r>
+              <a:rPr lang="en-US" noProof="1"/>
+              <a:t xml:space="preserve">        req.type ?? "", req.value, req.from ?? "", req.to ?? "")));</a:t>
+            </a:r>
+          </a:p>
+          <a:p>
+            <a:pPr>
+              <a:lnSpc>
+                <a:spcPct val="100000"/>
+              </a:lnSpc>
+              <a:spcBef>
+                <a:spcPts val="0"/>
+              </a:spcBef>
+              <a:spcAft>
+                <a:spcPts val="0"/>
+              </a:spcAft>
+            </a:pPr>
+            <a:r>
+              <a:rPr lang="en-US" noProof="1"/>
+              <a:t xml:space="preserve">  }</a:t>
+            </a:r>
+          </a:p>
+          <a:p>
+            <a:pPr>
+              <a:lnSpc>
+                <a:spcPct val="100000"/>
+              </a:lnSpc>
+              <a:spcBef>
+                <a:spcPts val="0"/>
+              </a:spcBef>
+              <a:spcAft>
+                <a:spcPts val="0"/>
+              </a:spcAft>
+            </a:pPr>
+            <a:r>
+              <a:rPr lang="en-US" noProof="1"/>
+              <a:t xml:space="preserve">}</a:t>
+            </a:r>
+          </a:p>
+        </p:txBody>
+      </p:sp>
+      <p:sp>
+        <p:nvSpPr>
+          <p:cNvPr id="4" name="Text Placeholder 3">
+            <a:extLst>
+              <a:ext uri="{FF2B5EF4-FFF2-40B4-BE49-F238E27FC236}">
+                <a16:creationId xmlns:a16="http://schemas.microsoft.com/office/drawing/2014/main" id="{0B26EB7F-8CAF-5D1F-5E05-124982840E83}"/>
+              </a:ext>
+            </a:extLst>
+          </p:cNvPr>
+          <p:cNvSpPr>
+            <a:spLocks noGrp="1"/>
+          </p:cNvSpPr>
+          <p:nvPr>
+            <p:ph type="body" sz="quarter" idx="12"/>
+          </p:nvPr>
+        </p:nvSpPr>
+        <p:spPr/>
+        <p:txBody>
+          <a:bodyPr/>
+          <a:lstStyle/>
+          <a:p>
+            <a:r>
               <a:rPr lang="es-MX"/>
-              <a:t> definición del servicio o endpoint]</a:t>
-            </a:r>
-            <a:endParaRPr lang="es-EC"/>
-          </a:p>
-        </p:txBody>
-      </p:sp>
-      <p:sp>
-        <p:nvSpPr>
-          <p:cNvPr id="4" name="Text Placeholder 3">
-            <a:extLst>
-              <a:ext uri="{FF2B5EF4-FFF2-40B4-BE49-F238E27FC236}">
-                <a16:creationId xmlns:a16="http://schemas.microsoft.com/office/drawing/2014/main" id="{0B26EB7F-8CAF-5D1F-5E05-124982840E83}"/>
-              </a:ext>
-            </a:extLst>
-          </p:cNvPr>
-          <p:cNvSpPr>
-            <a:spLocks noGrp="1"/>
-          </p:cNvSpPr>
-          <p:nvPr>
-            <p:ph type="body" sz="quarter" idx="12"/>
-          </p:nvPr>
-        </p:nvSpPr>
-        <p:spPr/>
-        <p:txBody>
-          <a:bodyPr/>
-          <a:lstStyle/>
+              <a:t>[ApiController] y [Route] publican el recurso POST /converter; ASP.NET Core convierte el JSON en ConvertRequestDTO.</a:t>
+            </a:r>
+          </a:p>
           <a:p>
             <a:r>
               <a:rPr lang="es-MX"/>
-              <a:t>[Qué hace este fragmento.]</a:t>
-            </a:r>
-          </a:p>
-          <a:p>
-            <a:r>
-              <a:rPr lang="es-MX"/>
-              <a:t>[Por qué es importante en el proyecto.]</a:t>
+              <a:t>Responde 200 con el resultado o 401 si el token del encabezado Authorization no es válido.</a:t>
             </a:r>
             <a:endParaRPr lang="es-EC"/>
           </a:p>
@@ -11035,13 +11301,13 @@
           <a:p>
             <a:r>
               <a:rPr lang="es-MX"/>
-              <a:t>Ejecutar el servidor desde [IDE o comando].</a:t>
+              <a:t>Ejecutar el servidor desde Visual Studio 2026 o con dotnet run.</a:t>
             </a:r>
           </a:p>
           <a:p>
             <a:r>
               <a:rPr lang="es-MX"/>
-              <a:t>Comprobar [el WSDL en … | el endpoint en …].</a:t>
+              <a:t>Comprobar el endpoint en http://localhost:5013/login (POST con JSON).</a:t>
             </a:r>
           </a:p>
           <a:p>
@@ -11240,7 +11506,7 @@
           <a:p>
             <a:r>
               <a:rPr lang="es-EC"/>
-              <a:t>[Tecnología] · patrón MVC</a:t>
+              <a:t>.NET 10 + HttpClient · patrón MVC</a:t>
             </a:r>
           </a:p>
         </p:txBody>
@@ -11327,7 +11593,7 @@
           <a:p>
             <a:r>
               <a:rPr lang="es-MX"/>
-              <a:t>Proyecto CONSOLE_CON_UNI_[JAVA | DOTNET]_[SOAP | RESTful] creado en [IDE].</a:t>
+              <a:t>Proyecto CONSOLE_CON_UNI_DOTNET_RESTful creado en Visual Studio 2026.</a:t>
             </a:r>
           </a:p>
           <a:p>
@@ -11510,58 +11776,304 @@
           <a:p>
             <a:pPr>
               <a:lnSpc>
-                <a:spcPct val="110000"/>
+                <a:spcPct val="100000"/>
               </a:lnSpc>
+              <a:spcBef>
+                <a:spcPts val="0"/>
+              </a:spcBef>
+              <a:spcAft>
+                <a:spcPts val="0"/>
+              </a:spcAft>
             </a:pPr>
             <a:r>
-              <a:rPr lang="es-MX"/>
-              <a:t>[Pega aquí cómo el cliente</a:t>
+              <a:rPr lang="en-US" noProof="1"/>
+              <a:t xml:space="preserve">internal class RESTfulClient</a:t>
             </a:r>
           </a:p>
           <a:p>
             <a:pPr>
               <a:lnSpc>
-                <a:spcPct val="110000"/>
+                <a:spcPct val="100000"/>
               </a:lnSpc>
+              <a:spcBef>
+                <a:spcPts val="0"/>
+              </a:spcBef>
+              <a:spcAft>
+                <a:spcPts val="0"/>
+              </a:spcAft>
             </a:pPr>
             <a:r>
+              <a:rPr lang="en-US" noProof="1"/>
+              <a:t xml:space="preserve">{</a:t>
+            </a:r>
+          </a:p>
+          <a:p>
+            <a:pPr>
+              <a:lnSpc>
+                <a:spcPct val="100000"/>
+              </a:lnSpc>
+              <a:spcBef>
+                <a:spcPts val="0"/>
+              </a:spcBef>
+              <a:spcAft>
+                <a:spcPts val="0"/>
+              </a:spcAft>
+            </a:pPr>
+            <a:r>
+              <a:rPr lang="en-US" noProof="1"/>
+              <a:t xml:space="preserve">  private string baseUrl = "http://localhost:5000/";</a:t>
+            </a:r>
+          </a:p>
+          <a:p>
+            <a:pPr>
+              <a:lnSpc>
+                <a:spcPct val="100000"/>
+              </a:lnSpc>
+              <a:spcBef>
+                <a:spcPts val="0"/>
+              </a:spcBef>
+              <a:spcAft>
+                <a:spcPts val="0"/>
+              </a:spcAft>
+            </a:pPr>
+            <a:r>
+              <a:rPr lang="en-US" noProof="1"/>
+              <a:t xml:space="preserve">  private HttpClient http = new HttpClient();</a:t>
+            </a:r>
+          </a:p>
+          <a:p>
+            <a:pPr>
+              <a:lnSpc>
+                <a:spcPct val="100000"/>
+              </a:lnSpc>
+              <a:spcBef>
+                <a:spcPts val="0"/>
+              </a:spcBef>
+              <a:spcAft>
+                <a:spcPts val="0"/>
+              </a:spcAft>
+            </a:pPr>
+            <a:endParaRPr lang="en-US" noProof="1"/>
+          </a:p>
+          <a:p>
+            <a:pPr>
+              <a:lnSpc>
+                <a:spcPct val="100000"/>
+              </a:lnSpc>
+              <a:spcBef>
+                <a:spcPts val="0"/>
+              </a:spcBef>
+              <a:spcAft>
+                <a:spcPts val="0"/>
+              </a:spcAft>
+            </a:pPr>
+            <a:r>
+              <a:rPr lang="en-US" noProof="1"/>
+              <a:t xml:space="preserve">  public async Task&lt;string&gt; GetAsync(string endpoint, string token)</a:t>
+            </a:r>
+          </a:p>
+          <a:p>
+            <a:pPr>
+              <a:lnSpc>
+                <a:spcPct val="100000"/>
+              </a:lnSpc>
+              <a:spcBef>
+                <a:spcPts val="0"/>
+              </a:spcBef>
+              <a:spcAft>
+                <a:spcPts val="0"/>
+              </a:spcAft>
+            </a:pPr>
+            <a:r>
+              <a:rPr lang="en-US" noProof="1"/>
+              <a:t xml:space="preserve">  {</a:t>
+            </a:r>
+          </a:p>
+          <a:p>
+            <a:pPr>
+              <a:lnSpc>
+                <a:spcPct val="100000"/>
+              </a:lnSpc>
+              <a:spcBef>
+                <a:spcPts val="0"/>
+              </a:spcBef>
+              <a:spcAft>
+                <a:spcPts val="0"/>
+              </a:spcAft>
+            </a:pPr>
+            <a:r>
+              <a:rPr lang="en-US" noProof="1"/>
+              <a:t xml:space="preserve">    using HttpRequestMessage request = new HttpRequestMessage(</a:t>
+            </a:r>
+          </a:p>
+          <a:p>
+            <a:pPr>
+              <a:lnSpc>
+                <a:spcPct val="100000"/>
+              </a:lnSpc>
+              <a:spcBef>
+                <a:spcPts val="0"/>
+              </a:spcBef>
+              <a:spcAft>
+                <a:spcPts val="0"/>
+              </a:spcAft>
+            </a:pPr>
+            <a:r>
+              <a:rPr lang="en-US" noProof="1"/>
+              <a:t xml:space="preserve">      HttpMethod.Get, baseUrl + endpoint);</a:t>
+            </a:r>
+          </a:p>
+          <a:p>
+            <a:pPr>
+              <a:lnSpc>
+                <a:spcPct val="100000"/>
+              </a:lnSpc>
+              <a:spcBef>
+                <a:spcPts val="0"/>
+              </a:spcBef>
+              <a:spcAft>
+                <a:spcPts val="0"/>
+              </a:spcAft>
+            </a:pPr>
+            <a:r>
+              <a:rPr lang="en-US" noProof="1"/>
+              <a:t xml:space="preserve">    request.Headers.Add("Accept", "application/json");</a:t>
+            </a:r>
+          </a:p>
+          <a:p>
+            <a:pPr>
+              <a:lnSpc>
+                <a:spcPct val="100000"/>
+              </a:lnSpc>
+              <a:spcBef>
+                <a:spcPts val="0"/>
+              </a:spcBef>
+              <a:spcAft>
+                <a:spcPts val="0"/>
+              </a:spcAft>
+            </a:pPr>
+            <a:r>
+              <a:rPr lang="en-US" noProof="1"/>
+              <a:t xml:space="preserve">    request.Headers.Add("Authorization", token);</a:t>
+            </a:r>
+          </a:p>
+          <a:p>
+            <a:pPr>
+              <a:lnSpc>
+                <a:spcPct val="100000"/>
+              </a:lnSpc>
+              <a:spcBef>
+                <a:spcPts val="0"/>
+              </a:spcBef>
+              <a:spcAft>
+                <a:spcPts val="0"/>
+              </a:spcAft>
+            </a:pPr>
+            <a:r>
+              <a:rPr lang="en-US" noProof="1"/>
+              <a:t xml:space="preserve">    using HttpResponseMessage response =</a:t>
+            </a:r>
+          </a:p>
+          <a:p>
+            <a:pPr>
+              <a:lnSpc>
+                <a:spcPct val="100000"/>
+              </a:lnSpc>
+              <a:spcBef>
+                <a:spcPts val="0"/>
+              </a:spcBef>
+              <a:spcAft>
+                <a:spcPts val="0"/>
+              </a:spcAft>
+            </a:pPr>
+            <a:r>
+              <a:rPr lang="en-US" noProof="1"/>
+              <a:t xml:space="preserve">      await http.SendAsync(request);</a:t>
+            </a:r>
+          </a:p>
+          <a:p>
+            <a:pPr>
+              <a:lnSpc>
+                <a:spcPct val="100000"/>
+              </a:lnSpc>
+              <a:spcBef>
+                <a:spcPts val="0"/>
+              </a:spcBef>
+              <a:spcAft>
+                <a:spcPts val="0"/>
+              </a:spcAft>
+            </a:pPr>
+            <a:r>
+              <a:rPr lang="en-US" noProof="1"/>
+              <a:t xml:space="preserve">    return await response.Content.ReadAsStringAsync();</a:t>
+            </a:r>
+          </a:p>
+          <a:p>
+            <a:pPr>
+              <a:lnSpc>
+                <a:spcPct val="100000"/>
+              </a:lnSpc>
+              <a:spcBef>
+                <a:spcPts val="0"/>
+              </a:spcBef>
+              <a:spcAft>
+                <a:spcPts val="0"/>
+              </a:spcAft>
+            </a:pPr>
+            <a:r>
+              <a:rPr lang="en-US" noProof="1"/>
+              <a:t xml:space="preserve">  }</a:t>
+            </a:r>
+          </a:p>
+          <a:p>
+            <a:pPr>
+              <a:lnSpc>
+                <a:spcPct val="100000"/>
+              </a:lnSpc>
+              <a:spcBef>
+                <a:spcPts val="0"/>
+              </a:spcBef>
+              <a:spcAft>
+                <a:spcPts val="0"/>
+              </a:spcAft>
+            </a:pPr>
+            <a:r>
+              <a:rPr lang="en-US" noProof="1"/>
+              <a:t xml:space="preserve">}</a:t>
+            </a:r>
+          </a:p>
+        </p:txBody>
+      </p:sp>
+      <p:sp>
+        <p:nvSpPr>
+          <p:cNvPr id="4" name="Text Placeholder 3">
+            <a:extLst>
+              <a:ext uri="{FF2B5EF4-FFF2-40B4-BE49-F238E27FC236}">
+                <a16:creationId xmlns:a16="http://schemas.microsoft.com/office/drawing/2014/main" id="{532B24EF-7A3C-74C9-6C54-DEF8F61E4574}"/>
+              </a:ext>
+            </a:extLst>
+          </p:cNvPr>
+          <p:cNvSpPr>
+            <a:spLocks noGrp="1"/>
+          </p:cNvSpPr>
+          <p:nvPr>
+            <p:ph type="body" sz="quarter" idx="12"/>
+          </p:nvPr>
+        </p:nvSpPr>
+        <p:spPr/>
+        <p:txBody>
+          <a:bodyPr/>
+          <a:lstStyle/>
+          <a:p>
+            <a:r>
               <a:rPr lang="es-MX"/>
-              <a:t> llama al servidor]</a:t>
-            </a:r>
-            <a:endParaRPr lang="es-EC"/>
-          </a:p>
-        </p:txBody>
-      </p:sp>
-      <p:sp>
-        <p:nvSpPr>
-          <p:cNvPr id="4" name="Text Placeholder 3">
-            <a:extLst>
-              <a:ext uri="{FF2B5EF4-FFF2-40B4-BE49-F238E27FC236}">
-                <a16:creationId xmlns:a16="http://schemas.microsoft.com/office/drawing/2014/main" id="{532B24EF-7A3C-74C9-6C54-DEF8F61E4574}"/>
-              </a:ext>
-            </a:extLst>
-          </p:cNvPr>
-          <p:cNvSpPr>
-            <a:spLocks noGrp="1"/>
-          </p:cNvSpPr>
-          <p:nvPr>
-            <p:ph type="body" sz="quarter" idx="12"/>
-          </p:nvPr>
-        </p:nvSpPr>
-        <p:spPr/>
-        <p:txBody>
-          <a:bodyPr/>
-          <a:lstStyle/>
+              <a:t>HttpClient envía la petición con el token en el encabezado Authorization y devuelve el JSON como texto.</a:t>
+            </a:r>
+          </a:p>
           <a:p>
             <a:r>
               <a:rPr lang="es-MX"/>
-              <a:t>[Qué hace este fragmento.]</a:t>
-            </a:r>
-          </a:p>
-          <a:p>
-            <a:r>
-              <a:rPr lang="es-MX"/>
-              <a:t>[Cómo maneja errores o la sesión.]</a:t>
+              <a:t>Las llamadas son asíncronas (async/await) para no bloquear el menú mientras responde el servidor.</a:t>
             </a:r>
             <a:endParaRPr lang="es-EC"/>
           </a:p>
@@ -11680,7 +12192,7 @@
           <a:p>
             <a:r>
               <a:rPr lang="es-MX"/>
-              <a:t>Conversión de Unidades [SOAP | RESTful] sin BDD en [JAVA | .NET]</a:t>
+              <a:t>Conversión de Unidades RESTful sin BDD en .NET</a:t>
             </a:r>
             <a:endParaRPr lang="es-EC"/>
           </a:p>
@@ -11709,7 +12221,7 @@
           <a:p>
             <a:r>
               <a:rPr lang="pt-BR"/>
-              <a:t>[TI.1.X] · Arquitectura de Software</a:t>
+              <a:t>TI.1.4 · Arquitectura de Software</a:t>
             </a:r>
             <a:endParaRPr lang="es-EC"/>
           </a:p>
@@ -11751,7 +12263,7 @@
             </a:r>
             <a:r>
               <a:rPr lang="es-MX"/>
-              <a:t>  [Nombre Apellido] · [Nombre Apellido] · [Nombre Apellido]</a:t>
+              <a:t xml:space="preserve">  Diego Mateo Sosa Flores · Marcos David Escobar Vela · Carlos Isaac Ñato Caiza</a:t>
             </a:r>
           </a:p>
           <a:p>
@@ -11770,7 +12282,7 @@
             </a:r>
             <a:r>
               <a:rPr lang="es-MX"/>
-              <a:t>  [Ing. Nombre del tutor]</a:t>
+              <a:t xml:space="preserve">  Ing. Eduardo Mauricio Campaña Ortega</a:t>
             </a:r>
           </a:p>
           <a:p>
@@ -12152,7 +12664,7 @@
           <a:p>
             <a:r>
               <a:rPr lang="es-EC"/>
-              <a:t>[Tecnología] · patrón MVC</a:t>
+              <a:t>WinForms + HttpClient · patrón MVC</a:t>
             </a:r>
           </a:p>
         </p:txBody>
@@ -12239,7 +12751,7 @@
           <a:p>
             <a:r>
               <a:rPr lang="es-MX"/>
-              <a:t>Proyecto ESC_CON_UNI_[JAVA | DOTNET]_[SOAP | RESTful] creado en [IDE].</a:t>
+              <a:t>Proyecto ESC_CON_UNI_DOTNET_RESTful creado en Visual Studio 2026.</a:t>
             </a:r>
           </a:p>
           <a:p>
@@ -12422,58 +12934,355 @@
           <a:p>
             <a:pPr>
               <a:lnSpc>
-                <a:spcPct val="110000"/>
+                <a:spcPct val="100000"/>
               </a:lnSpc>
+              <a:spcBef>
+                <a:spcPts val="0"/>
+              </a:spcBef>
+              <a:spcAft>
+                <a:spcPts val="0"/>
+              </a:spcAft>
             </a:pPr>
             <a:r>
-              <a:rPr lang="es-MX"/>
-              <a:t>[Pega aquí cómo el cliente</a:t>
+              <a:rPr lang="en-US" noProof="1"/>
+              <a:t xml:space="preserve">public Task&lt;string&gt; PostAsync(EndpointsEnum endpoint,</a:t>
             </a:r>
           </a:p>
           <a:p>
             <a:pPr>
               <a:lnSpc>
-                <a:spcPct val="110000"/>
+                <a:spcPct val="100000"/>
               </a:lnSpc>
+              <a:spcBef>
+                <a:spcPts val="0"/>
+              </a:spcBef>
+              <a:spcAft>
+                <a:spcPts val="0"/>
+              </a:spcAft>
             </a:pPr>
             <a:r>
+              <a:rPr lang="en-US" noProof="1"/>
+              <a:t xml:space="preserve">  string json, string? token)</a:t>
+            </a:r>
+          </a:p>
+          <a:p>
+            <a:pPr>
+              <a:lnSpc>
+                <a:spcPct val="100000"/>
+              </a:lnSpc>
+              <a:spcBef>
+                <a:spcPts val="0"/>
+              </a:spcBef>
+              <a:spcAft>
+                <a:spcPts val="0"/>
+              </a:spcAft>
+            </a:pPr>
+            <a:r>
+              <a:rPr lang="en-US" noProof="1"/>
+              <a:t xml:space="preserve">{</a:t>
+            </a:r>
+          </a:p>
+          <a:p>
+            <a:pPr>
+              <a:lnSpc>
+                <a:spcPct val="100000"/>
+              </a:lnSpc>
+              <a:spcBef>
+                <a:spcPts val="0"/>
+              </a:spcBef>
+              <a:spcAft>
+                <a:spcPts val="0"/>
+              </a:spcAft>
+            </a:pPr>
+            <a:r>
+              <a:rPr lang="en-US" noProof="1"/>
+              <a:t xml:space="preserve">  var peticion = Peticion(HttpMethod.Post,</a:t>
+            </a:r>
+          </a:p>
+          <a:p>
+            <a:pPr>
+              <a:lnSpc>
+                <a:spcPct val="100000"/>
+              </a:lnSpc>
+              <a:spcBef>
+                <a:spcPts val="0"/>
+              </a:spcBef>
+              <a:spcAft>
+                <a:spcPts val="0"/>
+              </a:spcAft>
+            </a:pPr>
+            <a:r>
+              <a:rPr lang="en-US" noProof="1"/>
+              <a:t xml:space="preserve">    endpoint.ToString(), token);</a:t>
+            </a:r>
+          </a:p>
+          <a:p>
+            <a:pPr>
+              <a:lnSpc>
+                <a:spcPct val="100000"/>
+              </a:lnSpc>
+              <a:spcBef>
+                <a:spcPts val="0"/>
+              </a:spcBef>
+              <a:spcAft>
+                <a:spcPts val="0"/>
+              </a:spcAft>
+            </a:pPr>
+            <a:r>
+              <a:rPr lang="en-US" noProof="1"/>
+              <a:t xml:space="preserve">  peticion.Content = new StringContent(json,</a:t>
+            </a:r>
+          </a:p>
+          <a:p>
+            <a:pPr>
+              <a:lnSpc>
+                <a:spcPct val="100000"/>
+              </a:lnSpc>
+              <a:spcBef>
+                <a:spcPts val="0"/>
+              </a:spcBef>
+              <a:spcAft>
+                <a:spcPts val="0"/>
+              </a:spcAft>
+            </a:pPr>
+            <a:r>
+              <a:rPr lang="en-US" noProof="1"/>
+              <a:t xml:space="preserve">    Encoding.UTF8, "application/json");</a:t>
+            </a:r>
+          </a:p>
+          <a:p>
+            <a:pPr>
+              <a:lnSpc>
+                <a:spcPct val="100000"/>
+              </a:lnSpc>
+              <a:spcBef>
+                <a:spcPts val="0"/>
+              </a:spcBef>
+              <a:spcAft>
+                <a:spcPts val="0"/>
+              </a:spcAft>
+            </a:pPr>
+            <a:r>
+              <a:rPr lang="en-US" noProof="1"/>
+              <a:t xml:space="preserve">  return EnviarAsync(peticion);</a:t>
+            </a:r>
+          </a:p>
+          <a:p>
+            <a:pPr>
+              <a:lnSpc>
+                <a:spcPct val="100000"/>
+              </a:lnSpc>
+              <a:spcBef>
+                <a:spcPts val="0"/>
+              </a:spcBef>
+              <a:spcAft>
+                <a:spcPts val="0"/>
+              </a:spcAft>
+            </a:pPr>
+            <a:r>
+              <a:rPr lang="en-US" noProof="1"/>
+              <a:t xml:space="preserve">}</a:t>
+            </a:r>
+          </a:p>
+          <a:p>
+            <a:pPr>
+              <a:lnSpc>
+                <a:spcPct val="100000"/>
+              </a:lnSpc>
+              <a:spcBef>
+                <a:spcPts val="0"/>
+              </a:spcBef>
+              <a:spcAft>
+                <a:spcPts val="0"/>
+              </a:spcAft>
+            </a:pPr>
+            <a:endParaRPr lang="en-US" noProof="1"/>
+          </a:p>
+          <a:p>
+            <a:pPr>
+              <a:lnSpc>
+                <a:spcPct val="100000"/>
+              </a:lnSpc>
+              <a:spcBef>
+                <a:spcPts val="0"/>
+              </a:spcBef>
+              <a:spcAft>
+                <a:spcPts val="0"/>
+              </a:spcAft>
+            </a:pPr>
+            <a:r>
+              <a:rPr lang="en-US" noProof="1"/>
+              <a:t xml:space="preserve">private HttpRequestMessage Peticion(HttpMethod metodo,</a:t>
+            </a:r>
+          </a:p>
+          <a:p>
+            <a:pPr>
+              <a:lnSpc>
+                <a:spcPct val="100000"/>
+              </a:lnSpc>
+              <a:spcBef>
+                <a:spcPts val="0"/>
+              </a:spcBef>
+              <a:spcAft>
+                <a:spcPts val="0"/>
+              </a:spcAft>
+            </a:pPr>
+            <a:r>
+              <a:rPr lang="en-US" noProof="1"/>
+              <a:t xml:space="preserve">  string recurso, string? token)</a:t>
+            </a:r>
+          </a:p>
+          <a:p>
+            <a:pPr>
+              <a:lnSpc>
+                <a:spcPct val="100000"/>
+              </a:lnSpc>
+              <a:spcBef>
+                <a:spcPts val="0"/>
+              </a:spcBef>
+              <a:spcAft>
+                <a:spcPts val="0"/>
+              </a:spcAft>
+            </a:pPr>
+            <a:r>
+              <a:rPr lang="en-US" noProof="1"/>
+              <a:t xml:space="preserve">{</a:t>
+            </a:r>
+          </a:p>
+          <a:p>
+            <a:pPr>
+              <a:lnSpc>
+                <a:spcPct val="100000"/>
+              </a:lnSpc>
+              <a:spcBef>
+                <a:spcPts val="0"/>
+              </a:spcBef>
+              <a:spcAft>
+                <a:spcPts val="0"/>
+              </a:spcAft>
+            </a:pPr>
+            <a:r>
+              <a:rPr lang="en-US" noProof="1"/>
+              <a:t xml:space="preserve">  var peticion = new HttpRequestMessage(metodo, urlBase + recurso);</a:t>
+            </a:r>
+          </a:p>
+          <a:p>
+            <a:pPr>
+              <a:lnSpc>
+                <a:spcPct val="100000"/>
+              </a:lnSpc>
+              <a:spcBef>
+                <a:spcPts val="0"/>
+              </a:spcBef>
+              <a:spcAft>
+                <a:spcPts val="0"/>
+              </a:spcAft>
+            </a:pPr>
+            <a:r>
+              <a:rPr lang="en-US" noProof="1"/>
+              <a:t xml:space="preserve">  peticion.Headers.Accept.ParseAdd("application/json");</a:t>
+            </a:r>
+          </a:p>
+          <a:p>
+            <a:pPr>
+              <a:lnSpc>
+                <a:spcPct val="100000"/>
+              </a:lnSpc>
+              <a:spcBef>
+                <a:spcPts val="0"/>
+              </a:spcBef>
+              <a:spcAft>
+                <a:spcPts val="0"/>
+              </a:spcAft>
+            </a:pPr>
+            <a:r>
+              <a:rPr lang="en-US" noProof="1"/>
+              <a:t xml:space="preserve">  if (token != null)</a:t>
+            </a:r>
+          </a:p>
+          <a:p>
+            <a:pPr>
+              <a:lnSpc>
+                <a:spcPct val="100000"/>
+              </a:lnSpc>
+              <a:spcBef>
+                <a:spcPts val="0"/>
+              </a:spcBef>
+              <a:spcAft>
+                <a:spcPts val="0"/>
+              </a:spcAft>
+            </a:pPr>
+            <a:r>
+              <a:rPr lang="en-US" noProof="1"/>
+              <a:t xml:space="preserve">    peticion.Headers.TryAddWithoutValidation("Authorization", token);</a:t>
+            </a:r>
+          </a:p>
+          <a:p>
+            <a:pPr>
+              <a:lnSpc>
+                <a:spcPct val="100000"/>
+              </a:lnSpc>
+              <a:spcBef>
+                <a:spcPts val="0"/>
+              </a:spcBef>
+              <a:spcAft>
+                <a:spcPts val="0"/>
+              </a:spcAft>
+            </a:pPr>
+            <a:r>
+              <a:rPr lang="en-US" noProof="1"/>
+              <a:t xml:space="preserve">  return peticion;</a:t>
+            </a:r>
+          </a:p>
+          <a:p>
+            <a:pPr>
+              <a:lnSpc>
+                <a:spcPct val="100000"/>
+              </a:lnSpc>
+              <a:spcBef>
+                <a:spcPts val="0"/>
+              </a:spcBef>
+              <a:spcAft>
+                <a:spcPts val="0"/>
+              </a:spcAft>
+            </a:pPr>
+            <a:r>
+              <a:rPr lang="en-US" noProof="1"/>
+              <a:t xml:space="preserve">}</a:t>
+            </a:r>
+          </a:p>
+        </p:txBody>
+      </p:sp>
+      <p:sp>
+        <p:nvSpPr>
+          <p:cNvPr id="4" name="Text Placeholder 3">
+            <a:extLst>
+              <a:ext uri="{FF2B5EF4-FFF2-40B4-BE49-F238E27FC236}">
+                <a16:creationId xmlns:a16="http://schemas.microsoft.com/office/drawing/2014/main" id="{20A8AF34-9793-D88F-FF58-6E72CF9E4E62}"/>
+              </a:ext>
+            </a:extLst>
+          </p:cNvPr>
+          <p:cNvSpPr>
+            <a:spLocks noGrp="1"/>
+          </p:cNvSpPr>
+          <p:nvPr>
+            <p:ph type="body" sz="quarter" idx="12"/>
+          </p:nvPr>
+        </p:nvSpPr>
+        <p:spPr/>
+        <p:txBody>
+          <a:bodyPr/>
+          <a:lstStyle/>
+          <a:p>
+            <a:r>
               <a:rPr lang="es-MX"/>
-              <a:t> llama al servidor]</a:t>
-            </a:r>
-            <a:endParaRPr lang="es-EC"/>
-          </a:p>
-        </p:txBody>
-      </p:sp>
-      <p:sp>
-        <p:nvSpPr>
-          <p:cNvPr id="4" name="Text Placeholder 3">
-            <a:extLst>
-              <a:ext uri="{FF2B5EF4-FFF2-40B4-BE49-F238E27FC236}">
-                <a16:creationId xmlns:a16="http://schemas.microsoft.com/office/drawing/2014/main" id="{20A8AF34-9793-D88F-FF58-6E72CF9E4E62}"/>
-              </a:ext>
-            </a:extLst>
-          </p:cNvPr>
-          <p:cNvSpPr>
-            <a:spLocks noGrp="1"/>
-          </p:cNvSpPr>
-          <p:nvPr>
-            <p:ph type="body" sz="quarter" idx="12"/>
-          </p:nvPr>
-        </p:nvSpPr>
-        <p:spPr/>
-        <p:txBody>
-          <a:bodyPr/>
-          <a:lstStyle/>
+              <a:t>Arma las peticiones POST con cuerpo JSON hacia http://localhost:5013 y agrega el token cuando hay sesión.</a:t>
+            </a:r>
+          </a:p>
           <a:p>
             <a:r>
               <a:rPr lang="es-MX"/>
-              <a:t>[Qué hace este fragmento.]</a:t>
-            </a:r>
-          </a:p>
-          <a:p>
-            <a:r>
-              <a:rPr lang="es-MX"/>
-              <a:t>[Cómo maneja errores o la sesión.]</a:t>
+              <a:t>El HttpClient tiene un tiempo de espera de 15 s para que la ventana no quede esperando sin fin.</a:t>
             </a:r>
             <a:endParaRPr lang="es-EC"/>
           </a:p>
@@ -12904,7 +13713,7 @@
           <a:p>
             <a:r>
               <a:rPr lang="es-EC"/>
-              <a:t>[Tecnología] · patrón MVC</a:t>
+              <a:t>ASP.NET Core MVC + HttpClient · patrón MVC</a:t>
             </a:r>
           </a:p>
         </p:txBody>
@@ -12991,7 +13800,7 @@
           <a:p>
             <a:r>
               <a:rPr lang="es-MX"/>
-              <a:t>Proyecto WEB_CON_UNI_[JAVA | DOTNET]_[SOAP | RESTful] creado en [IDE].</a:t>
+              <a:t>Proyecto WEB_CON_UNI_DOTNET_RESTful creado en Visual Studio 2026.</a:t>
             </a:r>
           </a:p>
           <a:p>
@@ -13174,58 +13983,375 @@
           <a:p>
             <a:pPr>
               <a:lnSpc>
-                <a:spcPct val="110000"/>
+                <a:spcPct val="100000"/>
               </a:lnSpc>
+              <a:spcBef>
+                <a:spcPts val="0"/>
+              </a:spcBef>
+              <a:spcAft>
+                <a:spcPts val="0"/>
+              </a:spcAft>
             </a:pPr>
             <a:r>
-              <a:rPr lang="es-MX"/>
-              <a:t>[Pega aquí cómo el cliente</a:t>
+              <a:rPr lang="en-US" noProof="1"/>
+              <a:t xml:space="preserve">[HttpPost("/login")]</a:t>
             </a:r>
           </a:p>
           <a:p>
             <a:pPr>
               <a:lnSpc>
-                <a:spcPct val="110000"/>
+                <a:spcPct val="100000"/>
               </a:lnSpc>
+              <a:spcBef>
+                <a:spcPts val="0"/>
+              </a:spcBef>
+              <a:spcAft>
+                <a:spcPts val="0"/>
+              </a:spcAft>
             </a:pPr>
             <a:r>
+              <a:rPr lang="en-US" noProof="1"/>
+              <a:t xml:space="preserve">public async Task&lt;IActionResult&gt; Ingresar(</a:t>
+            </a:r>
+          </a:p>
+          <a:p>
+            <a:pPr>
+              <a:lnSpc>
+                <a:spcPct val="100000"/>
+              </a:lnSpc>
+              <a:spcBef>
+                <a:spcPts val="0"/>
+              </a:spcBef>
+              <a:spcAft>
+                <a:spcPts val="0"/>
+              </a:spcAft>
+            </a:pPr>
+            <a:r>
+              <a:rPr lang="en-US" noProof="1"/>
+              <a:t xml:space="preserve">  string? usuario, string? clave)</a:t>
+            </a:r>
+          </a:p>
+          <a:p>
+            <a:pPr>
+              <a:lnSpc>
+                <a:spcPct val="100000"/>
+              </a:lnSpc>
+              <a:spcBef>
+                <a:spcPts val="0"/>
+              </a:spcBef>
+              <a:spcAft>
+                <a:spcPts val="0"/>
+              </a:spcAft>
+            </a:pPr>
+            <a:r>
+              <a:rPr lang="en-US" noProof="1"/>
+              <a:t xml:space="preserve">{</a:t>
+            </a:r>
+          </a:p>
+          <a:p>
+            <a:pPr>
+              <a:lnSpc>
+                <a:spcPct val="100000"/>
+              </a:lnSpc>
+              <a:spcBef>
+                <a:spcPts val="0"/>
+              </a:spcBef>
+              <a:spcAft>
+                <a:spcPts val="0"/>
+              </a:spcAft>
+            </a:pPr>
+            <a:r>
+              <a:rPr lang="en-US" noProof="1"/>
+              <a:t xml:space="preserve">  var vista = new LoginVista { Usuario = usuario ?? "" };</a:t>
+            </a:r>
+          </a:p>
+          <a:p>
+            <a:pPr>
+              <a:lnSpc>
+                <a:spcPct val="100000"/>
+              </a:lnSpc>
+              <a:spcBef>
+                <a:spcPts val="0"/>
+              </a:spcBef>
+              <a:spcAft>
+                <a:spcPts val="0"/>
+              </a:spcAft>
+            </a:pPr>
+            <a:r>
+              <a:rPr lang="en-US" noProof="1"/>
+              <a:t xml:space="preserve">  // ... validación de campos vacíos</a:t>
+            </a:r>
+          </a:p>
+          <a:p>
+            <a:pPr>
+              <a:lnSpc>
+                <a:spcPct val="100000"/>
+              </a:lnSpc>
+              <a:spcBef>
+                <a:spcPts val="0"/>
+              </a:spcBef>
+              <a:spcAft>
+                <a:spcPts val="0"/>
+              </a:spcAft>
+            </a:pPr>
+            <a:r>
+              <a:rPr lang="en-US" noProof="1"/>
+              <a:t xml:space="preserve">  var sesion = new Sesion();</a:t>
+            </a:r>
+          </a:p>
+          <a:p>
+            <a:pPr>
+              <a:lnSpc>
+                <a:spcPct val="100000"/>
+              </a:lnSpc>
+              <a:spcBef>
+                <a:spcPts val="0"/>
+              </a:spcBef>
+              <a:spcAft>
+                <a:spcPts val="0"/>
+              </a:spcAft>
+            </a:pPr>
+            <a:r>
+              <a:rPr lang="en-US" noProof="1"/>
+              <a:t xml:space="preserve">  try</a:t>
+            </a:r>
+          </a:p>
+          <a:p>
+            <a:pPr>
+              <a:lnSpc>
+                <a:spcPct val="100000"/>
+              </a:lnSpc>
+              <a:spcBef>
+                <a:spcPts val="0"/>
+              </a:spcBef>
+              <a:spcAft>
+                <a:spcPts val="0"/>
+              </a:spcAft>
+            </a:pPr>
+            <a:r>
+              <a:rPr lang="en-US" noProof="1"/>
+              <a:t xml:space="preserve">  {</a:t>
+            </a:r>
+          </a:p>
+          <a:p>
+            <a:pPr>
+              <a:lnSpc>
+                <a:spcPct val="100000"/>
+              </a:lnSpc>
+              <a:spcBef>
+                <a:spcPts val="0"/>
+              </a:spcBef>
+              <a:spcAft>
+                <a:spcPts val="0"/>
+              </a:spcAft>
+            </a:pPr>
+            <a:r>
+              <a:rPr lang="en-US" noProof="1"/>
+              <a:t xml:space="preserve">    await fabrica.CrearServicio(sesion)</a:t>
+            </a:r>
+          </a:p>
+          <a:p>
+            <a:pPr>
+              <a:lnSpc>
+                <a:spcPct val="100000"/>
+              </a:lnSpc>
+              <a:spcBef>
+                <a:spcPts val="0"/>
+              </a:spcBef>
+              <a:spcAft>
+                <a:spcPts val="0"/>
+              </a:spcAft>
+            </a:pPr>
+            <a:r>
+              <a:rPr lang="en-US" noProof="1"/>
+              <a:t xml:space="preserve">      .IniciarSesionAsync(usuario.Trim(), clave);</a:t>
+            </a:r>
+          </a:p>
+          <a:p>
+            <a:pPr>
+              <a:lnSpc>
+                <a:spcPct val="100000"/>
+              </a:lnSpc>
+              <a:spcBef>
+                <a:spcPts val="0"/>
+              </a:spcBef>
+              <a:spcAft>
+                <a:spcPts val="0"/>
+              </a:spcAft>
+            </a:pPr>
+            <a:r>
+              <a:rPr lang="en-US" noProof="1"/>
+              <a:t xml:space="preserve">  }</a:t>
+            </a:r>
+          </a:p>
+          <a:p>
+            <a:pPr>
+              <a:lnSpc>
+                <a:spcPct val="100000"/>
+              </a:lnSpc>
+              <a:spcBef>
+                <a:spcPts val="0"/>
+              </a:spcBef>
+              <a:spcAft>
+                <a:spcPts val="0"/>
+              </a:spcAft>
+            </a:pPr>
+            <a:r>
+              <a:rPr lang="en-US" noProof="1"/>
+              <a:t xml:space="preserve">  catch (ServicioException e)</a:t>
+            </a:r>
+          </a:p>
+          <a:p>
+            <a:pPr>
+              <a:lnSpc>
+                <a:spcPct val="100000"/>
+              </a:lnSpc>
+              <a:spcBef>
+                <a:spcPts val="0"/>
+              </a:spcBef>
+              <a:spcAft>
+                <a:spcPts val="0"/>
+              </a:spcAft>
+            </a:pPr>
+            <a:r>
+              <a:rPr lang="en-US" noProof="1"/>
+              <a:t xml:space="preserve">  {</a:t>
+            </a:r>
+          </a:p>
+          <a:p>
+            <a:pPr>
+              <a:lnSpc>
+                <a:spcPct val="100000"/>
+              </a:lnSpc>
+              <a:spcBef>
+                <a:spcPts val="0"/>
+              </a:spcBef>
+              <a:spcAft>
+                <a:spcPts val="0"/>
+              </a:spcAft>
+            </a:pPr>
+            <a:r>
+              <a:rPr lang="en-US" noProof="1"/>
+              <a:t xml:space="preserve">    vista.Error = e.Message;</a:t>
+            </a:r>
+          </a:p>
+          <a:p>
+            <a:pPr>
+              <a:lnSpc>
+                <a:spcPct val="100000"/>
+              </a:lnSpc>
+              <a:spcBef>
+                <a:spcPts val="0"/>
+              </a:spcBef>
+              <a:spcAft>
+                <a:spcPts val="0"/>
+              </a:spcAft>
+            </a:pPr>
+            <a:r>
+              <a:rPr lang="en-US" noProof="1"/>
+              <a:t xml:space="preserve">    return await VistaAsync(vista);</a:t>
+            </a:r>
+          </a:p>
+          <a:p>
+            <a:pPr>
+              <a:lnSpc>
+                <a:spcPct val="100000"/>
+              </a:lnSpc>
+              <a:spcBef>
+                <a:spcPts val="0"/>
+              </a:spcBef>
+              <a:spcAft>
+                <a:spcPts val="0"/>
+              </a:spcAft>
+            </a:pPr>
+            <a:r>
+              <a:rPr lang="en-US" noProof="1"/>
+              <a:t xml:space="preserve">  }</a:t>
+            </a:r>
+          </a:p>
+          <a:p>
+            <a:pPr>
+              <a:lnSpc>
+                <a:spcPct val="100000"/>
+              </a:lnSpc>
+              <a:spcBef>
+                <a:spcPts val="0"/>
+              </a:spcBef>
+              <a:spcAft>
+                <a:spcPts val="0"/>
+              </a:spcAft>
+            </a:pPr>
+            <a:r>
+              <a:rPr lang="en-US" noProof="1"/>
+              <a:t xml:space="preserve">  SesionUsuario.Guardar(HttpContext, sesion);</a:t>
+            </a:r>
+          </a:p>
+          <a:p>
+            <a:pPr>
+              <a:lnSpc>
+                <a:spcPct val="100000"/>
+              </a:lnSpc>
+              <a:spcBef>
+                <a:spcPts val="0"/>
+              </a:spcBef>
+              <a:spcAft>
+                <a:spcPts val="0"/>
+              </a:spcAft>
+            </a:pPr>
+            <a:r>
+              <a:rPr lang="en-US" noProof="1"/>
+              <a:t xml:space="preserve">  return Redirect("~/menu");</a:t>
+            </a:r>
+          </a:p>
+          <a:p>
+            <a:pPr>
+              <a:lnSpc>
+                <a:spcPct val="100000"/>
+              </a:lnSpc>
+              <a:spcBef>
+                <a:spcPts val="0"/>
+              </a:spcBef>
+              <a:spcAft>
+                <a:spcPts val="0"/>
+              </a:spcAft>
+            </a:pPr>
+            <a:r>
+              <a:rPr lang="en-US" noProof="1"/>
+              <a:t xml:space="preserve">}</a:t>
+            </a:r>
+          </a:p>
+        </p:txBody>
+      </p:sp>
+      <p:sp>
+        <p:nvSpPr>
+          <p:cNvPr id="4" name="Text Placeholder 3">
+            <a:extLst>
+              <a:ext uri="{FF2B5EF4-FFF2-40B4-BE49-F238E27FC236}">
+                <a16:creationId xmlns:a16="http://schemas.microsoft.com/office/drawing/2014/main" id="{083ED04C-DD32-D005-5F14-AF65141A1F3E}"/>
+              </a:ext>
+            </a:extLst>
+          </p:cNvPr>
+          <p:cNvSpPr>
+            <a:spLocks noGrp="1"/>
+          </p:cNvSpPr>
+          <p:nvPr>
+            <p:ph type="body" sz="quarter" idx="12"/>
+          </p:nvPr>
+        </p:nvSpPr>
+        <p:spPr/>
+        <p:txBody>
+          <a:bodyPr/>
+          <a:lstStyle/>
+          <a:p>
+            <a:r>
               <a:rPr lang="es-MX"/>
-              <a:t> llama al servidor]</a:t>
-            </a:r>
-            <a:endParaRPr lang="es-EC"/>
-          </a:p>
-        </p:txBody>
-      </p:sp>
-      <p:sp>
-        <p:nvSpPr>
-          <p:cNvPr id="4" name="Text Placeholder 3">
-            <a:extLst>
-              <a:ext uri="{FF2B5EF4-FFF2-40B4-BE49-F238E27FC236}">
-                <a16:creationId xmlns:a16="http://schemas.microsoft.com/office/drawing/2014/main" id="{083ED04C-DD32-D005-5F14-AF65141A1F3E}"/>
-              </a:ext>
-            </a:extLst>
-          </p:cNvPr>
-          <p:cNvSpPr>
-            <a:spLocks noGrp="1"/>
-          </p:cNvSpPr>
-          <p:nvPr>
-            <p:ph type="body" sz="quarter" idx="12"/>
-          </p:nvPr>
-        </p:nvSpPr>
-        <p:spPr/>
-        <p:txBody>
-          <a:bodyPr/>
-          <a:lstStyle/>
+              <a:t>El controlador MVC recibe el formulario y llama a la API REST a través de ConversorServicio y RESTfulClient.</a:t>
+            </a:r>
+          </a:p>
           <a:p>
             <a:r>
               <a:rPr lang="es-MX"/>
-              <a:t>[Qué hace este fragmento.]</a:t>
-            </a:r>
-          </a:p>
-          <a:p>
-            <a:r>
-              <a:rPr lang="es-MX"/>
-              <a:t>[Cómo maneja errores o la sesión.]</a:t>
+              <a:t>Si el login falla, vuelve a mostrar la vista con el mensaje; si funciona, guarda la sesión y va al menú.</a:t>
             </a:r>
             <a:endParaRPr lang="es-EC"/>
           </a:p>
@@ -13656,7 +14782,7 @@
           <a:p>
             <a:r>
               <a:rPr lang="es-EC"/>
-              <a:t>[Tecnología] · patrón MVC</a:t>
+              <a:t>.NET MAUI (Android) · patrón MVC</a:t>
             </a:r>
           </a:p>
         </p:txBody>
@@ -13778,7 +14904,7 @@
             </a:r>
             <a:r>
               <a:rPr lang="es-EC" sz="2200"/>
-              <a:t>   Servidor [SOAP | RESTful]</a:t>
+              <a:t xml:space="preserve">   Servidor RESTful</a:t>
             </a:r>
           </a:p>
           <a:p>
@@ -14068,7 +15194,7 @@
           <a:p>
             <a:r>
               <a:rPr lang="es-MX"/>
-              <a:t>Proyecto MOV_CON_UNI_[JAVA | DOTNET]_[SOAP | RESTful] creado en [IDE].</a:t>
+              <a:t>Proyecto MOV_CON_UNI_DOTNET_RESTFUL creado en Visual Studio 2026.</a:t>
             </a:r>
           </a:p>
           <a:p>
@@ -14251,58 +15377,406 @@
           <a:p>
             <a:pPr>
               <a:lnSpc>
-                <a:spcPct val="110000"/>
+                <a:spcPct val="100000"/>
               </a:lnSpc>
+              <a:spcBef>
+                <a:spcPts val="0"/>
+              </a:spcBef>
+              <a:spcAft>
+                <a:spcPts val="0"/>
+              </a:spcAft>
             </a:pPr>
             <a:r>
-              <a:rPr lang="es-MX"/>
-              <a:t>[Pega aquí cómo el cliente</a:t>
+              <a:rPr lang="en-US" noProof="1"/>
+              <a:t xml:space="preserve">public Task&lt;RespuestaHttp&gt; PostJsonAsync(string ruta,</a:t>
             </a:r>
           </a:p>
           <a:p>
             <a:pPr>
               <a:lnSpc>
-                <a:spcPct val="110000"/>
+                <a:spcPct val="100000"/>
               </a:lnSpc>
+              <a:spcBef>
+                <a:spcPts val="0"/>
+              </a:spcBef>
+              <a:spcAft>
+                <a:spcPts val="0"/>
+              </a:spcAft>
             </a:pPr>
             <a:r>
+              <a:rPr lang="en-US" noProof="1"/>
+              <a:t xml:space="preserve">  string json, string? token)</a:t>
+            </a:r>
+          </a:p>
+          <a:p>
+            <a:pPr>
+              <a:lnSpc>
+                <a:spcPct val="100000"/>
+              </a:lnSpc>
+              <a:spcBef>
+                <a:spcPts val="0"/>
+              </a:spcBef>
+              <a:spcAft>
+                <a:spcPts val="0"/>
+              </a:spcAft>
+            </a:pPr>
+            <a:r>
+              <a:rPr lang="en-US" noProof="1"/>
+              <a:t xml:space="preserve">{</a:t>
+            </a:r>
+          </a:p>
+          <a:p>
+            <a:pPr>
+              <a:lnSpc>
+                <a:spcPct val="100000"/>
+              </a:lnSpc>
+              <a:spcBef>
+                <a:spcPts val="0"/>
+              </a:spcBef>
+              <a:spcAft>
+                <a:spcPts val="0"/>
+              </a:spcAft>
+            </a:pPr>
+            <a:r>
+              <a:rPr lang="en-US" noProof="1"/>
+              <a:t xml:space="preserve">  var peticion = new HttpRequestMessage(HttpMethod.Post, ruta)</a:t>
+            </a:r>
+          </a:p>
+          <a:p>
+            <a:pPr>
+              <a:lnSpc>
+                <a:spcPct val="100000"/>
+              </a:lnSpc>
+              <a:spcBef>
+                <a:spcPts val="0"/>
+              </a:spcBef>
+              <a:spcAft>
+                <a:spcPts val="0"/>
+              </a:spcAft>
+            </a:pPr>
+            <a:r>
+              <a:rPr lang="en-US" noProof="1"/>
+              <a:t xml:space="preserve">  {</a:t>
+            </a:r>
+          </a:p>
+          <a:p>
+            <a:pPr>
+              <a:lnSpc>
+                <a:spcPct val="100000"/>
+              </a:lnSpc>
+              <a:spcBef>
+                <a:spcPts val="0"/>
+              </a:spcBef>
+              <a:spcAft>
+                <a:spcPts val="0"/>
+              </a:spcAft>
+            </a:pPr>
+            <a:r>
+              <a:rPr lang="en-US" noProof="1"/>
+              <a:t xml:space="preserve">    Content = new StringContent(json, Encoding.UTF8,</a:t>
+            </a:r>
+          </a:p>
+          <a:p>
+            <a:pPr>
+              <a:lnSpc>
+                <a:spcPct val="100000"/>
+              </a:lnSpc>
+              <a:spcBef>
+                <a:spcPts val="0"/>
+              </a:spcBef>
+              <a:spcAft>
+                <a:spcPts val="0"/>
+              </a:spcAft>
+            </a:pPr>
+            <a:r>
+              <a:rPr lang="en-US" noProof="1"/>
+              <a:t xml:space="preserve">      "application/json"),</a:t>
+            </a:r>
+          </a:p>
+          <a:p>
+            <a:pPr>
+              <a:lnSpc>
+                <a:spcPct val="100000"/>
+              </a:lnSpc>
+              <a:spcBef>
+                <a:spcPts val="0"/>
+              </a:spcBef>
+              <a:spcAft>
+                <a:spcPts val="0"/>
+              </a:spcAft>
+            </a:pPr>
+            <a:r>
+              <a:rPr lang="en-US" noProof="1"/>
+              <a:t xml:space="preserve">  };</a:t>
+            </a:r>
+          </a:p>
+          <a:p>
+            <a:pPr>
+              <a:lnSpc>
+                <a:spcPct val="100000"/>
+              </a:lnSpc>
+              <a:spcBef>
+                <a:spcPts val="0"/>
+              </a:spcBef>
+              <a:spcAft>
+                <a:spcPts val="0"/>
+              </a:spcAft>
+            </a:pPr>
+            <a:r>
+              <a:rPr lang="en-US" noProof="1"/>
+              <a:t xml:space="preserve">  return EnviarAsync(peticion, token);</a:t>
+            </a:r>
+          </a:p>
+          <a:p>
+            <a:pPr>
+              <a:lnSpc>
+                <a:spcPct val="100000"/>
+              </a:lnSpc>
+              <a:spcBef>
+                <a:spcPts val="0"/>
+              </a:spcBef>
+              <a:spcAft>
+                <a:spcPts val="0"/>
+              </a:spcAft>
+            </a:pPr>
+            <a:r>
+              <a:rPr lang="en-US" noProof="1"/>
+              <a:t xml:space="preserve">}</a:t>
+            </a:r>
+          </a:p>
+          <a:p>
+            <a:pPr>
+              <a:lnSpc>
+                <a:spcPct val="100000"/>
+              </a:lnSpc>
+              <a:spcBef>
+                <a:spcPts val="0"/>
+              </a:spcBef>
+              <a:spcAft>
+                <a:spcPts val="0"/>
+              </a:spcAft>
+            </a:pPr>
+            <a:endParaRPr lang="en-US" noProof="1"/>
+          </a:p>
+          <a:p>
+            <a:pPr>
+              <a:lnSpc>
+                <a:spcPct val="100000"/>
+              </a:lnSpc>
+              <a:spcBef>
+                <a:spcPts val="0"/>
+              </a:spcBef>
+              <a:spcAft>
+                <a:spcPts val="0"/>
+              </a:spcAft>
+            </a:pPr>
+            <a:r>
+              <a:rPr lang="en-US" noProof="1"/>
+              <a:t xml:space="preserve">private async Task&lt;RespuestaHttp&gt; EnviarAsync(</a:t>
+            </a:r>
+          </a:p>
+          <a:p>
+            <a:pPr>
+              <a:lnSpc>
+                <a:spcPct val="100000"/>
+              </a:lnSpc>
+              <a:spcBef>
+                <a:spcPts val="0"/>
+              </a:spcBef>
+              <a:spcAft>
+                <a:spcPts val="0"/>
+              </a:spcAft>
+            </a:pPr>
+            <a:r>
+              <a:rPr lang="en-US" noProof="1"/>
+              <a:t xml:space="preserve">  HttpRequestMessage peticion, string? token)</a:t>
+            </a:r>
+          </a:p>
+          <a:p>
+            <a:pPr>
+              <a:lnSpc>
+                <a:spcPct val="100000"/>
+              </a:lnSpc>
+              <a:spcBef>
+                <a:spcPts val="0"/>
+              </a:spcBef>
+              <a:spcAft>
+                <a:spcPts val="0"/>
+              </a:spcAft>
+            </a:pPr>
+            <a:r>
+              <a:rPr lang="en-US" noProof="1"/>
+              <a:t xml:space="preserve">{</a:t>
+            </a:r>
+          </a:p>
+          <a:p>
+            <a:pPr>
+              <a:lnSpc>
+                <a:spcPct val="100000"/>
+              </a:lnSpc>
+              <a:spcBef>
+                <a:spcPts val="0"/>
+              </a:spcBef>
+              <a:spcAft>
+                <a:spcPts val="0"/>
+              </a:spcAft>
+            </a:pPr>
+            <a:r>
+              <a:rPr lang="en-US" noProof="1"/>
+              <a:t xml:space="preserve">  peticion.Headers.Accept.ParseAdd("application/json");</a:t>
+            </a:r>
+          </a:p>
+          <a:p>
+            <a:pPr>
+              <a:lnSpc>
+                <a:spcPct val="100000"/>
+              </a:lnSpc>
+              <a:spcBef>
+                <a:spcPts val="0"/>
+              </a:spcBef>
+              <a:spcAft>
+                <a:spcPts val="0"/>
+              </a:spcAft>
+            </a:pPr>
+            <a:r>
+              <a:rPr lang="en-US" noProof="1"/>
+              <a:t xml:space="preserve">  if (token is not null)</a:t>
+            </a:r>
+          </a:p>
+          <a:p>
+            <a:pPr>
+              <a:lnSpc>
+                <a:spcPct val="100000"/>
+              </a:lnSpc>
+              <a:spcBef>
+                <a:spcPts val="0"/>
+              </a:spcBef>
+              <a:spcAft>
+                <a:spcPts val="0"/>
+              </a:spcAft>
+            </a:pPr>
+            <a:r>
+              <a:rPr lang="en-US" noProof="1"/>
+              <a:t xml:space="preserve">    peticion.Headers.TryAddWithoutValidation("Authorization", token);</a:t>
+            </a:r>
+          </a:p>
+          <a:p>
+            <a:pPr>
+              <a:lnSpc>
+                <a:spcPct val="100000"/>
+              </a:lnSpc>
+              <a:spcBef>
+                <a:spcPts val="0"/>
+              </a:spcBef>
+              <a:spcAft>
+                <a:spcPts val="0"/>
+              </a:spcAft>
+            </a:pPr>
+            <a:r>
+              <a:rPr lang="en-US" noProof="1"/>
+              <a:t xml:space="preserve">  using var respuesta = await _http.SendAsync(peticion);</a:t>
+            </a:r>
+          </a:p>
+          <a:p>
+            <a:pPr>
+              <a:lnSpc>
+                <a:spcPct val="100000"/>
+              </a:lnSpc>
+              <a:spcBef>
+                <a:spcPts val="0"/>
+              </a:spcBef>
+              <a:spcAft>
+                <a:spcPts val="0"/>
+              </a:spcAft>
+            </a:pPr>
+            <a:r>
+              <a:rPr lang="en-US" noProof="1"/>
+              <a:t xml:space="preserve">  string cuerpo = await respuesta.Content.ReadAsStringAsync();</a:t>
+            </a:r>
+          </a:p>
+          <a:p>
+            <a:pPr>
+              <a:lnSpc>
+                <a:spcPct val="100000"/>
+              </a:lnSpc>
+              <a:spcBef>
+                <a:spcPts val="0"/>
+              </a:spcBef>
+              <a:spcAft>
+                <a:spcPts val="0"/>
+              </a:spcAft>
+            </a:pPr>
+            <a:r>
+              <a:rPr lang="en-US" noProof="1"/>
+              <a:t xml:space="preserve">  return new RespuestaHttp((int)respuesta.StatusCode,</a:t>
+            </a:r>
+          </a:p>
+          <a:p>
+            <a:pPr>
+              <a:lnSpc>
+                <a:spcPct val="100000"/>
+              </a:lnSpc>
+              <a:spcBef>
+                <a:spcPts val="0"/>
+              </a:spcBef>
+              <a:spcAft>
+                <a:spcPts val="0"/>
+              </a:spcAft>
+            </a:pPr>
+            <a:r>
+              <a:rPr lang="en-US" noProof="1"/>
+              <a:t xml:space="preserve">    respuesta.ReasonPhrase, cuerpo);</a:t>
+            </a:r>
+          </a:p>
+          <a:p>
+            <a:pPr>
+              <a:lnSpc>
+                <a:spcPct val="100000"/>
+              </a:lnSpc>
+              <a:spcBef>
+                <a:spcPts val="0"/>
+              </a:spcBef>
+              <a:spcAft>
+                <a:spcPts val="0"/>
+              </a:spcAft>
+            </a:pPr>
+            <a:r>
+              <a:rPr lang="en-US" noProof="1"/>
+              <a:t xml:space="preserve">}</a:t>
+            </a:r>
+          </a:p>
+        </p:txBody>
+      </p:sp>
+      <p:sp>
+        <p:nvSpPr>
+          <p:cNvPr id="4" name="Text Placeholder 3">
+            <a:extLst>
+              <a:ext uri="{FF2B5EF4-FFF2-40B4-BE49-F238E27FC236}">
+                <a16:creationId xmlns:a16="http://schemas.microsoft.com/office/drawing/2014/main" id="{8FA2B0E7-A824-A64D-CD4D-F66FF99B63E7}"/>
+              </a:ext>
+            </a:extLst>
+          </p:cNvPr>
+          <p:cNvSpPr>
+            <a:spLocks noGrp="1"/>
+          </p:cNvSpPr>
+          <p:nvPr>
+            <p:ph type="body" sz="quarter" idx="12"/>
+          </p:nvPr>
+        </p:nvSpPr>
+        <p:spPr/>
+        <p:txBody>
+          <a:bodyPr/>
+          <a:lstStyle/>
+          <a:p>
+            <a:r>
               <a:rPr lang="es-MX"/>
-              <a:t> llama al servidor]</a:t>
-            </a:r>
-            <a:endParaRPr lang="es-EC"/>
-          </a:p>
-        </p:txBody>
-      </p:sp>
-      <p:sp>
-        <p:nvSpPr>
-          <p:cNvPr id="4" name="Text Placeholder 3">
-            <a:extLst>
-              <a:ext uri="{FF2B5EF4-FFF2-40B4-BE49-F238E27FC236}">
-                <a16:creationId xmlns:a16="http://schemas.microsoft.com/office/drawing/2014/main" id="{8FA2B0E7-A824-A64D-CD4D-F66FF99B63E7}"/>
-              </a:ext>
-            </a:extLst>
-          </p:cNvPr>
-          <p:cNvSpPr>
-            <a:spLocks noGrp="1"/>
-          </p:cNvSpPr>
-          <p:nvPr>
-            <p:ph type="body" sz="quarter" idx="12"/>
-          </p:nvPr>
-        </p:nvSpPr>
-        <p:spPr/>
-        <p:txBody>
-          <a:bodyPr/>
-          <a:lstStyle/>
+              <a:t>La app MAUI usa HttpClient con la URL base de RestConfig y envía el token en Authorization.</a:t>
+            </a:r>
+          </a:p>
           <a:p>
             <a:r>
               <a:rPr lang="es-MX"/>
-              <a:t>[Qué hace este fragmento.]</a:t>
-            </a:r>
-          </a:p>
-          <a:p>
-            <a:r>
-              <a:rPr lang="es-MX"/>
-              <a:t>[Cómo maneja errores o la sesión.]</a:t>
+              <a:t>Devuelve el código HTTP y el cuerpo para que el controlador muestre el mensaje del servidor si hay error.</a:t>
             </a:r>
             <a:endParaRPr lang="es-EC"/>
           </a:p>
@@ -16492,13 +17966,13 @@
           <a:p>
             <a:r>
               <a:rPr lang="es-MX"/>
-              <a:t>[Pruebas automáticas: N pruebas, todas correctas.]</a:t>
+              <a:t>155 pruebas automáticas: escritorio (83) y web (72).</a:t>
             </a:r>
           </a:p>
           <a:p>
             <a:r>
               <a:rPr lang="es-MX"/>
-              <a:t>[Herramienta usada: JUnit | xUnit].</a:t>
+              <a:t>Herramienta usada: xUnit.</a:t>
             </a:r>
           </a:p>
           <a:p>
@@ -16669,7 +18143,7 @@
           <a:p>
             <a:r>
               <a:rPr lang="es-MX"/>
-              <a:t>El servidor [SOAP | RESTful] fue consumido por cuatro clientes distintos sin cambiar su lógica, lo que muestra la interoperabilidad de una arquitectura orientada a servicios.</a:t>
+              <a:t>El servidor RESTful fue consumido por cuatro clientes distintos sin cambiar su lógica, lo que muestra la interoperabilidad de una arquitectura orientada a servicios.</a:t>
             </a:r>
           </a:p>
           <a:p>
@@ -16687,7 +18161,7 @@
           <a:p>
             <a:r>
               <a:rPr lang="es-MX"/>
-              <a:t>[Conclusión propia del proyecto.]</a:t>
+              <a:t>ASP.NET Core Web API devolvió códigos HTTP claros (200, 400 y 401) según el resultado de cada operación.</a:t>
             </a:r>
             <a:endParaRPr lang="es-EC"/>
           </a:p>
@@ -16840,7 +18314,7 @@
           <a:p>
             <a:r>
               <a:rPr lang="es-MX"/>
-              <a:t>Usar HTTPS [y WS-Security] para proteger el token en la red.</a:t>
+              <a:t>Usar HTTPS para proteger el token en la red.</a:t>
             </a:r>
           </a:p>
           <a:p>
@@ -16852,7 +18326,7 @@
           <a:p>
             <a:r>
               <a:rPr lang="es-MX"/>
-              <a:t>[Recomendación propia del proyecto.]</a:t>
+              <a:t>Activar la documentación OpenAPI ya incluida para probar los endpoints desde el navegador.</a:t>
             </a:r>
             <a:endParaRPr lang="es-EC"/>
           </a:p>
@@ -17039,7 +18513,7 @@
             </a:pPr>
             <a:r>
               <a:rPr lang="es-EC" sz="1500"/>
-              <a:t>[Autor. (Año). Título. Editorial o URL.]</a:t>
+              <a:t>Microsoft. (2026). Create web APIs with ASP.NET Core. https://learn.microsoft.com/aspnet/core/web-api/</a:t>
             </a:r>
           </a:p>
         </p:txBody>
@@ -17288,7 +18762,7 @@
             </a:pPr>
             <a:r>
               <a:rPr lang="es-MX"/>
-              <a:t>Desarrollar un sistema de conversión de unidades basado en un servicio web [SOAP | RESTful] en [JAVA | .NET], sin base de datos, consumido por clientes de consola, escritorio, web y móvil.</a:t>
+              <a:t>Desarrollar un sistema de conversión de unidades basado en un servicio web RESTful en .NET, sin base de datos, consumido por clientes de consola, escritorio, web y móvil.</a:t>
             </a:r>
             <a:endParaRPr lang="es-EC"/>
           </a:p>
@@ -17331,7 +18805,7 @@
           <a:p>
             <a:r>
               <a:rPr lang="es-MX"/>
-              <a:t>Implementar el servidor [SOAP | RESTful] con autenticación por token y conversión de seis magnitudes.</a:t>
+              <a:t>Implementar el servidor RESTful con autenticación por token y conversión de seis magnitudes.</a:t>
             </a:r>
           </a:p>
           <a:p>
@@ -17577,7 +19051,7 @@
           <a:p>
             <a:r>
               <a:rPr lang="es-MX"/>
-              <a:t>[SOAP y WSDL | REST y JSON]</a:t>
+              <a:t>REST y JSON</a:t>
             </a:r>
             <a:endParaRPr lang="es-EC"/>
           </a:p>
@@ -17606,19 +19080,13 @@
           <a:p>
             <a:r>
               <a:rPr lang="es-MX"/>
-              <a:t>[SOAP] Intercambia mensajes XML dentro de un sobre (Envelope). Un contrato WSDL describe las operaciones del servicio.</a:t>
+              <a:t>Expone recursos por URL que se usan con verbos HTTP (GET, POST) e intercambian datos en JSON.</a:t>
             </a:r>
           </a:p>
           <a:p>
             <a:r>
               <a:rPr lang="es-MX"/>
-              <a:t>[RESTful] Expone recursos por URL que se usan con verbos HTTP (GET, POST) e intercambian datos en JSON.</a:t>
-            </a:r>
-          </a:p>
-          <a:p>
-            <a:r>
-              <a:rPr lang="es-MX"/>
-              <a:t>[Borra la opción que no corresponde y agrega una ventaja del protocolo.]</a:t>
+              <a:t>Ventaja: los mensajes JSON son livianos y cualquier cliente HTTP los consume sin generar código.</a:t>
             </a:r>
             <a:endParaRPr lang="es-EC"/>
           </a:p>
@@ -18234,7 +19702,7 @@
                           </a:solidFill>
                           <a:latin typeface="Segoe UI" panose="020B0502040204020203" pitchFamily="34" charset="0"/>
                         </a:rPr>
-                        <a:t>[Ej.: ASP.NET Core + SoapCore | Jakarta EE en Payara]</a:t>
+                        <a:t>ASP.NET Core Web API</a:t>
                       </a:r>
                       <a:endParaRPr lang="es-EC" sz="1400">
                         <a:solidFill>
@@ -18272,7 +19740,7 @@
                           </a:solidFill>
                           <a:latin typeface="Segoe UI" panose="020B0502040204020203" pitchFamily="34" charset="0"/>
                         </a:rPr>
-                        <a:t>[x.y]</a:t>
+                        <a:t>.NET 10</a:t>
                       </a:r>
                     </a:p>
                   </a:txBody>
@@ -18343,7 +19811,7 @@
                           </a:solidFill>
                           <a:latin typeface="Segoe UI" panose="020B0502040204020203" pitchFamily="34" charset="0"/>
                         </a:rPr>
-                        <a:t>[Tecnología]</a:t>
+                        <a:t>.NET + HttpClient</a:t>
                       </a:r>
                     </a:p>
                   </a:txBody>
@@ -18375,7 +19843,7 @@
                           </a:solidFill>
                           <a:latin typeface="Segoe UI" panose="020B0502040204020203" pitchFamily="34" charset="0"/>
                         </a:rPr>
-                        <a:t>[x.y]</a:t>
+                        <a:t>.NET 10</a:t>
                       </a:r>
                     </a:p>
                   </a:txBody>
@@ -18446,7 +19914,7 @@
                           </a:solidFill>
                           <a:latin typeface="Segoe UI" panose="020B0502040204020203" pitchFamily="34" charset="0"/>
                         </a:rPr>
-                        <a:t>[Tecnología]</a:t>
+                        <a:t>WinForms + HttpClient</a:t>
                       </a:r>
                     </a:p>
                   </a:txBody>
@@ -18478,7 +19946,7 @@
                           </a:solidFill>
                           <a:latin typeface="Segoe UI" panose="020B0502040204020203" pitchFamily="34" charset="0"/>
                         </a:rPr>
-                        <a:t>[x.y]</a:t>
+                        <a:t>.NET 10</a:t>
                       </a:r>
                     </a:p>
                   </a:txBody>
@@ -18549,7 +20017,7 @@
                           </a:solidFill>
                           <a:latin typeface="Segoe UI" panose="020B0502040204020203" pitchFamily="34" charset="0"/>
                         </a:rPr>
-                        <a:t>[Tecnología]</a:t>
+                        <a:t>ASP.NET Core MVC + HttpClient</a:t>
                       </a:r>
                     </a:p>
                   </a:txBody>
@@ -18581,7 +20049,7 @@
                           </a:solidFill>
                           <a:latin typeface="Segoe UI" panose="020B0502040204020203" pitchFamily="34" charset="0"/>
                         </a:rPr>
-                        <a:t>[x.y]</a:t>
+                        <a:t>.NET 10</a:t>
                       </a:r>
                     </a:p>
                   </a:txBody>
@@ -18652,7 +20120,7 @@
                           </a:solidFill>
                           <a:latin typeface="Segoe UI" panose="020B0502040204020203" pitchFamily="34" charset="0"/>
                         </a:rPr>
-                        <a:t>[Tecnología]</a:t>
+                        <a:t>.NET MAUI (Android) + HttpClient</a:t>
                       </a:r>
                     </a:p>
                   </a:txBody>
@@ -18684,7 +20152,7 @@
                           </a:solidFill>
                           <a:latin typeface="Segoe UI" panose="020B0502040204020203" pitchFamily="34" charset="0"/>
                         </a:rPr>
-                        <a:t>[x.y]</a:t>
+                        <a:t>.NET 10</a:t>
                       </a:r>
                     </a:p>
                   </a:txBody>
@@ -18755,7 +20223,7 @@
                           </a:solidFill>
                           <a:latin typeface="Segoe UI" panose="020B0502040204020203" pitchFamily="34" charset="0"/>
                         </a:rPr>
-                        <a:t>[IDE, gestor de paquetes, emulador]</a:t>
+                        <a:t>Visual Studio 2026, NuGet, emulador Android</a:t>
                       </a:r>
                     </a:p>
                   </a:txBody>
@@ -18787,7 +20255,7 @@
                           </a:solidFill>
                           <a:latin typeface="Segoe UI" panose="020B0502040204020203" pitchFamily="34" charset="0"/>
                         </a:rPr>
-                        <a:t>[x.y]</a:t>
+                        <a:t>VS 2026</a:t>
                       </a:r>
                     </a:p>
                   </a:txBody>
@@ -19012,7 +20480,7 @@
                 </a:solidFill>
                 <a:latin typeface="Segoe UI Semibold" panose="020B0702040204020203" pitchFamily="34" charset="0"/>
               </a:rPr>
-              <a:t>Servidor [SOAP | RESTful]</a:t>
+              <a:t>Servidor RESTful</a:t>
             </a:r>
           </a:p>
           <a:p>
@@ -19028,7 +20496,7 @@
                 </a:solidFill>
                 <a:latin typeface="Segoe UI" panose="020B0502040204020203" pitchFamily="34" charset="0"/>
               </a:rPr>
-              <a:t>[JAVA | .NET] · [localhost:puerto]</a:t>
+              <a:t>.NET · localhost:5013</a:t>
             </a:r>
           </a:p>
           <a:p>
@@ -19132,7 +20600,7 @@
                 </a:solidFill>
                 <a:latin typeface="Segoe UI" panose="020B0502040204020203" pitchFamily="34" charset="0"/>
               </a:rPr>
-              <a:t>[Tecnología]</a:t>
+              <a:t>.NET (consola)</a:t>
             </a:r>
           </a:p>
         </p:txBody>
@@ -19263,7 +20731,7 @@
                 </a:solidFill>
                 <a:latin typeface="Segoe UI" panose="020B0502040204020203" pitchFamily="34" charset="0"/>
               </a:rPr>
-              <a:t>[Tecnología]</a:t>
+              <a:t>WinForms</a:t>
             </a:r>
           </a:p>
         </p:txBody>
@@ -19394,7 +20862,7 @@
                 </a:solidFill>
                 <a:latin typeface="Segoe UI" panose="020B0502040204020203" pitchFamily="34" charset="0"/>
               </a:rPr>
-              <a:t>[Tecnología]</a:t>
+              <a:t>ASP.NET Core MVC</a:t>
             </a:r>
           </a:p>
         </p:txBody>
@@ -19525,7 +20993,7 @@
                 </a:solidFill>
                 <a:latin typeface="Segoe UI" panose="020B0502040204020203" pitchFamily="34" charset="0"/>
               </a:rPr>
-              <a:t>[Tecnología]</a:t>
+              <a:t>.NET MAUI</a:t>
             </a:r>
           </a:p>
         </p:txBody>
@@ -19609,7 +21077,7 @@
                 </a:solidFill>
                 <a:latin typeface="Segoe UI" panose="020B0502040204020203" pitchFamily="34" charset="0"/>
               </a:rPr>
-              <a:t>Comunicación: [mensajes SOAP en XML | HTTP con JSON] · autenticación por token en cada llamada</a:t>
+              <a:t>Comunicación: HTTP con JSON · autenticación por token en cada llamada</a:t>
             </a:r>
             <a:endParaRPr lang="es-EC" sz="1400">
               <a:solidFill>
